--- a/2026主日司會模板python.pptx
+++ b/2026主日司會模板python.pptx
@@ -540,7 +540,7 @@
           </a:effectLst>
           <a:extLst>
             <a:ext uri="{C572A759-6A51-4108-AA02-DFA0A04FC94B}">
-              <ma14:wrappingTextBoxFlag xmlns:ma14="http://schemas.microsoft.com/office/mac/drawingml/2011/main" xmlns:a14="http://schemas.microsoft.com/office/drawing/2010/main" xmlns:m="http://schemas.openxmlformats.org/officeDocument/2006/math" xmlns="" val="1"/>
+              <ma14:wrappingTextBoxFlag xmlns="" xmlns:m="http://schemas.openxmlformats.org/officeDocument/2006/math" xmlns:a14="http://schemas.microsoft.com/office/drawing/2010/main" xmlns:ma14="http://schemas.microsoft.com/office/mac/drawingml/2011/main" val="1"/>
             </a:ext>
           </a:extLst>
         </p:spPr>
@@ -679,7 +679,7 @@
           </a:ln>
           <a:extLst>
             <a:ext uri="{C572A759-6A51-4108-AA02-DFA0A04FC94B}">
-              <ma14:wrappingTextBoxFlag xmlns:ma14="http://schemas.microsoft.com/office/mac/drawingml/2011/main" xmlns:a14="http://schemas.microsoft.com/office/drawing/2010/main" xmlns:m="http://schemas.openxmlformats.org/officeDocument/2006/math" xmlns="" val="1"/>
+              <ma14:wrappingTextBoxFlag xmlns="" xmlns:m="http://schemas.openxmlformats.org/officeDocument/2006/math" xmlns:a14="http://schemas.microsoft.com/office/drawing/2010/main" xmlns:ma14="http://schemas.microsoft.com/office/mac/drawingml/2011/main" val="1"/>
             </a:ext>
           </a:extLst>
         </p:spPr>
@@ -749,7 +749,7 @@
           </a:effectLst>
           <a:extLst>
             <a:ext uri="{C572A759-6A51-4108-AA02-DFA0A04FC94B}">
-              <ma14:wrappingTextBoxFlag xmlns:ma14="http://schemas.microsoft.com/office/mac/drawingml/2011/main" xmlns:a14="http://schemas.microsoft.com/office/drawing/2010/main" xmlns:m="http://schemas.openxmlformats.org/officeDocument/2006/math" xmlns="" val="1"/>
+              <ma14:wrappingTextBoxFlag xmlns="" xmlns:m="http://schemas.openxmlformats.org/officeDocument/2006/math" xmlns:a14="http://schemas.microsoft.com/office/drawing/2010/main" xmlns:ma14="http://schemas.microsoft.com/office/mac/drawingml/2011/main" val="1"/>
             </a:ext>
           </a:extLst>
         </p:spPr>
@@ -892,7 +892,7 @@
           </a:effectLst>
           <a:extLst>
             <a:ext uri="{C572A759-6A51-4108-AA02-DFA0A04FC94B}">
-              <ma14:wrappingTextBoxFlag xmlns:ma14="http://schemas.microsoft.com/office/mac/drawingml/2011/main" xmlns:a14="http://schemas.microsoft.com/office/drawing/2010/main" xmlns:m="http://schemas.openxmlformats.org/officeDocument/2006/math" xmlns="" val="1"/>
+              <ma14:wrappingTextBoxFlag xmlns="" xmlns:m="http://schemas.openxmlformats.org/officeDocument/2006/math" xmlns:a14="http://schemas.microsoft.com/office/drawing/2010/main" xmlns:ma14="http://schemas.microsoft.com/office/mac/drawingml/2011/main" val="1"/>
             </a:ext>
           </a:extLst>
         </p:spPr>
@@ -948,7 +948,7 @@
           </a:effectLst>
           <a:extLst>
             <a:ext uri="{C572A759-6A51-4108-AA02-DFA0A04FC94B}">
-              <ma14:wrappingTextBoxFlag xmlns:ma14="http://schemas.microsoft.com/office/mac/drawingml/2011/main" xmlns:a14="http://schemas.microsoft.com/office/drawing/2010/main" xmlns:m="http://schemas.openxmlformats.org/officeDocument/2006/math" xmlns="" val="1"/>
+              <ma14:wrappingTextBoxFlag xmlns="" xmlns:m="http://schemas.openxmlformats.org/officeDocument/2006/math" xmlns:a14="http://schemas.microsoft.com/office/drawing/2010/main" xmlns:ma14="http://schemas.microsoft.com/office/mac/drawingml/2011/main" val="1"/>
             </a:ext>
           </a:extLst>
         </p:spPr>
@@ -995,7 +995,7 @@
           </a:ln>
           <a:extLst>
             <a:ext uri="{C572A759-6A51-4108-AA02-DFA0A04FC94B}">
-              <ma14:wrappingTextBoxFlag xmlns:ma14="http://schemas.microsoft.com/office/mac/drawingml/2011/main" xmlns:a14="http://schemas.microsoft.com/office/drawing/2010/main" xmlns:m="http://schemas.openxmlformats.org/officeDocument/2006/math" xmlns="" val="1"/>
+              <ma14:wrappingTextBoxFlag xmlns="" xmlns:m="http://schemas.openxmlformats.org/officeDocument/2006/math" xmlns:a14="http://schemas.microsoft.com/office/drawing/2010/main" xmlns:ma14="http://schemas.microsoft.com/office/mac/drawingml/2011/main" val="1"/>
             </a:ext>
           </a:extLst>
         </p:spPr>
@@ -1158,7 +1158,7 @@
           </a:ln>
           <a:extLst>
             <a:ext uri="{C572A759-6A51-4108-AA02-DFA0A04FC94B}">
-              <ma14:wrappingTextBoxFlag xmlns:ma14="http://schemas.microsoft.com/office/mac/drawingml/2011/main" xmlns:a14="http://schemas.microsoft.com/office/drawing/2010/main" xmlns:m="http://schemas.openxmlformats.org/officeDocument/2006/math" xmlns="" val="1"/>
+              <ma14:wrappingTextBoxFlag xmlns="" xmlns:m="http://schemas.openxmlformats.org/officeDocument/2006/math" xmlns:a14="http://schemas.microsoft.com/office/drawing/2010/main" xmlns:ma14="http://schemas.microsoft.com/office/mac/drawingml/2011/main" val="1"/>
             </a:ext>
           </a:extLst>
         </p:spPr>
@@ -1219,7 +1219,7 @@
           </a:ln>
           <a:extLst>
             <a:ext uri="{C572A759-6A51-4108-AA02-DFA0A04FC94B}">
-              <ma14:wrappingTextBoxFlag xmlns:ma14="http://schemas.microsoft.com/office/mac/drawingml/2011/main" xmlns:a14="http://schemas.microsoft.com/office/drawing/2010/main" xmlns:m="http://schemas.openxmlformats.org/officeDocument/2006/math" xmlns="" val="1"/>
+              <ma14:wrappingTextBoxFlag xmlns="" xmlns:m="http://schemas.openxmlformats.org/officeDocument/2006/math" xmlns:a14="http://schemas.microsoft.com/office/drawing/2010/main" xmlns:ma14="http://schemas.microsoft.com/office/mac/drawingml/2011/main" val="1"/>
             </a:ext>
           </a:extLst>
         </p:spPr>
@@ -1352,7 +1352,7 @@
           </a:ln>
           <a:extLst>
             <a:ext uri="{C572A759-6A51-4108-AA02-DFA0A04FC94B}">
-              <ma14:wrappingTextBoxFlag xmlns:ma14="http://schemas.microsoft.com/office/mac/drawingml/2011/main" xmlns:a14="http://schemas.microsoft.com/office/drawing/2010/main" xmlns:m="http://schemas.openxmlformats.org/officeDocument/2006/math" xmlns="" val="1"/>
+              <ma14:wrappingTextBoxFlag xmlns="" xmlns:m="http://schemas.openxmlformats.org/officeDocument/2006/math" xmlns:a14="http://schemas.microsoft.com/office/drawing/2010/main" xmlns:ma14="http://schemas.microsoft.com/office/mac/drawingml/2011/main" val="1"/>
             </a:ext>
           </a:extLst>
         </p:spPr>
@@ -1571,7 +1571,7 @@
           </a:ln>
           <a:extLst>
             <a:ext uri="{C572A759-6A51-4108-AA02-DFA0A04FC94B}">
-              <ma14:wrappingTextBoxFlag xmlns:ma14="http://schemas.microsoft.com/office/mac/drawingml/2011/main" xmlns:a14="http://schemas.microsoft.com/office/drawing/2010/main" xmlns:m="http://schemas.openxmlformats.org/officeDocument/2006/math" xmlns="" val="1"/>
+              <ma14:wrappingTextBoxFlag xmlns="" xmlns:m="http://schemas.openxmlformats.org/officeDocument/2006/math" xmlns:a14="http://schemas.microsoft.com/office/drawing/2010/main" xmlns:ma14="http://schemas.microsoft.com/office/mac/drawingml/2011/main" val="1"/>
             </a:ext>
           </a:extLst>
         </p:spPr>
@@ -1793,7 +1793,7 @@
           </a:ln>
           <a:extLst>
             <a:ext uri="{C572A759-6A51-4108-AA02-DFA0A04FC94B}">
-              <ma14:wrappingTextBoxFlag xmlns:ma14="http://schemas.microsoft.com/office/mac/drawingml/2011/main" xmlns:a14="http://schemas.microsoft.com/office/drawing/2010/main" xmlns:m="http://schemas.openxmlformats.org/officeDocument/2006/math" xmlns="" val="1"/>
+              <ma14:wrappingTextBoxFlag xmlns="" xmlns:m="http://schemas.openxmlformats.org/officeDocument/2006/math" xmlns:a14="http://schemas.microsoft.com/office/drawing/2010/main" xmlns:ma14="http://schemas.microsoft.com/office/mac/drawingml/2011/main" val="1"/>
             </a:ext>
           </a:extLst>
         </p:spPr>
@@ -1989,7 +1989,7 @@
           </a:ln>
           <a:extLst>
             <a:ext uri="{C572A759-6A51-4108-AA02-DFA0A04FC94B}">
-              <ma14:wrappingTextBoxFlag xmlns:ma14="http://schemas.microsoft.com/office/mac/drawingml/2011/main" xmlns:a14="http://schemas.microsoft.com/office/drawing/2010/main" xmlns:m="http://schemas.openxmlformats.org/officeDocument/2006/math" xmlns="" val="1"/>
+              <ma14:wrappingTextBoxFlag xmlns="" xmlns:m="http://schemas.openxmlformats.org/officeDocument/2006/math" xmlns:a14="http://schemas.microsoft.com/office/drawing/2010/main" xmlns:ma14="http://schemas.microsoft.com/office/mac/drawingml/2011/main" val="1"/>
             </a:ext>
           </a:extLst>
         </p:spPr>
@@ -2358,8 +2358,8 @@
         </p:nvSpPr>
         <p:spPr>
           <a:xfrm>
-            <a:off x="1115285" y="2286000"/>
-            <a:ext cx="16057430" cy="2837902"/>
+            <a:off x="187255" y="2286000"/>
+            <a:ext cx="17906534" cy="2837902"/>
           </a:xfrm>
           <a:prstGeom prst="rect">
             <a:avLst/>
@@ -2563,8 +2563,8 @@
         </p:blipFill>
         <p:spPr>
           <a:xfrm>
-            <a:off x="469887" y="363347"/>
-            <a:ext cx="4177556" cy="1170381"/>
+            <a:off x="187255" y="183377"/>
+            <a:ext cx="2749019" cy="770163"/>
           </a:xfrm>
           <a:prstGeom prst="rect">
             <a:avLst/>
@@ -2689,7 +2689,7 @@
           </a:ln>
           <a:extLst>
             <a:ext uri="{C572A759-6A51-4108-AA02-DFA0A04FC94B}">
-              <ma14:wrappingTextBoxFlag xmlns:ma14="http://schemas.microsoft.com/office/mac/drawingml/2011/main" xmlns:a14="http://schemas.microsoft.com/office/drawing/2010/main" xmlns:m="http://schemas.openxmlformats.org/officeDocument/2006/math" xmlns="" val="1"/>
+              <ma14:wrappingTextBoxFlag xmlns="" xmlns:m="http://schemas.openxmlformats.org/officeDocument/2006/math" xmlns:a14="http://schemas.microsoft.com/office/drawing/2010/main" xmlns:ma14="http://schemas.microsoft.com/office/mac/drawingml/2011/main" val="1"/>
             </a:ext>
           </a:extLst>
         </p:spPr>
@@ -2728,7 +2728,7 @@
           </a:ln>
           <a:extLst>
             <a:ext uri="{C572A759-6A51-4108-AA02-DFA0A04FC94B}">
-              <ma14:wrappingTextBoxFlag xmlns:ma14="http://schemas.microsoft.com/office/mac/drawingml/2011/main" xmlns:a14="http://schemas.microsoft.com/office/drawing/2010/main" xmlns:m="http://schemas.openxmlformats.org/officeDocument/2006/math" xmlns="" val="1"/>
+              <ma14:wrappingTextBoxFlag xmlns="" xmlns:m="http://schemas.openxmlformats.org/officeDocument/2006/math" xmlns:a14="http://schemas.microsoft.com/office/drawing/2010/main" xmlns:ma14="http://schemas.microsoft.com/office/mac/drawingml/2011/main" val="1"/>
             </a:ext>
           </a:extLst>
         </p:spPr>
@@ -3742,10 +3742,10 @@
       </p:grpSpPr>
       <p:sp>
         <p:nvSpPr>
-          <p:cNvPr id="2" name="Title 1">
+          <p:cNvPr id="5" name="Title 4">
             <a:extLst>
               <a:ext uri="{FF2B5EF4-FFF2-40B4-BE49-F238E27FC236}">
-                <a16:creationId xmlns:a16="http://schemas.microsoft.com/office/drawing/2014/main" id="{3E784D6C-E408-D187-85AC-E92BC6BD17A4}"/>
+                <a16:creationId xmlns:a16="http://schemas.microsoft.com/office/drawing/2014/main" id="{2639437C-3B8C-69AB-387F-A4ED2EB9DA05}"/>
               </a:ext>
             </a:extLst>
           </p:cNvPr>
@@ -3767,10 +3767,10 @@
       </p:sp>
       <p:sp>
         <p:nvSpPr>
-          <p:cNvPr id="3" name="Text Placeholder 2">
+          <p:cNvPr id="6" name="Text Placeholder 5">
             <a:extLst>
               <a:ext uri="{FF2B5EF4-FFF2-40B4-BE49-F238E27FC236}">
-                <a16:creationId xmlns:a16="http://schemas.microsoft.com/office/drawing/2014/main" id="{94A6037A-FAE9-551E-AF05-56D76A0E168C}"/>
+                <a16:creationId xmlns:a16="http://schemas.microsoft.com/office/drawing/2014/main" id="{DD882B71-9E73-496E-A852-04CC46E4F43B}"/>
               </a:ext>
             </a:extLst>
           </p:cNvPr>
@@ -3792,10 +3792,10 @@
       </p:sp>
       <p:sp>
         <p:nvSpPr>
-          <p:cNvPr id="4" name="Text Placeholder 3">
+          <p:cNvPr id="7" name="Text Placeholder 6">
             <a:extLst>
               <a:ext uri="{FF2B5EF4-FFF2-40B4-BE49-F238E27FC236}">
-                <a16:creationId xmlns:a16="http://schemas.microsoft.com/office/drawing/2014/main" id="{EEEC1C30-2657-1097-D6C7-B6301D5E3FD4}"/>
+                <a16:creationId xmlns:a16="http://schemas.microsoft.com/office/drawing/2014/main" id="{538953AB-35D8-069C-E8DC-CDEA68D88AF1}"/>
               </a:ext>
             </a:extLst>
           </p:cNvPr>
